--- a/sample_layers_v19.pptx
+++ b/sample_layers_v19.pptx
@@ -6,6 +6,7 @@
   </p:sldMasterIdLst>
   <p:sldIdLst>
     <p:sldId id="256" r:id="rId7"/>
+    <p:sldId id="257" r:id="rId9"/>
   </p:sldIdLst>
   <p:sldSz cx="12191695" cy="6858000" type="screen4x3"/>
   <p:notesSz cx="6858000" cy="9144000"/>
@@ -503,6 +504,76 @@
           <a:p>
             <a:r>
               <a:t>V3 素材一覧（LAYV19）。視点固定レイヤー合成のための素材カタログ。TGL=視点A（bg_tgl・obj_rollcage_collapsing・worker_pinned）、高所=視点B（bg_aerial・worker_basket）。各パーツに視点A/Bを明記。Googleのみ生成素材（gemini-3-pro-image-preview）・OpenAI不使用・非破壊。</a:t>
+            </a:r>
+          </a:p>
+        </p:txBody>
+      </p:sp>
+      <p:sp>
+        <p:nvSpPr>
+          <p:cNvPr id="4" name="Slide Number Placeholder 3"/>
+          <p:cNvSpPr>
+            <a:spLocks noGrp="1"/>
+          </p:cNvSpPr>
+          <p:nvPr>
+            <p:ph type="sldNum" idx="5" sz="quarter"/>
+          </p:nvPr>
+        </p:nvSpPr>
+        <p:spPr/>
+      </p:sp>
+    </p:spTree>
+  </p:cSld>
+  <p:clrMapOvr>
+    <a:masterClrMapping/>
+  </p:clrMapOvr>
+</p:notes>
+</file>
+
+<file path=ppt/notesSlides/notesSlide2.xml><?xml version="1.0" encoding="utf-8"?>
+<p:notes xmlns:a="http://schemas.openxmlformats.org/drawingml/2006/main" xmlns:p="http://schemas.openxmlformats.org/presentationml/2006/main" xmlns:r="http://schemas.openxmlformats.org/officeDocument/2006/relationships">
+  <p:cSld>
+    <p:spTree>
+      <p:nvGrpSpPr>
+        <p:cNvPr id="1" name=""/>
+        <p:cNvGrpSpPr/>
+        <p:nvPr/>
+      </p:nvGrpSpPr>
+      <p:grpSpPr>
+        <a:xfrm>
+          <a:off x="0" y="0"/>
+          <a:ext cx="0" cy="0"/>
+          <a:chOff x="0" y="0"/>
+          <a:chExt cx="0" cy="0"/>
+        </a:xfrm>
+      </p:grpSpPr>
+      <p:sp>
+        <p:nvSpPr>
+          <p:cNvPr id="2" name="Slide Image Placeholder 1"/>
+          <p:cNvSpPr>
+            <a:spLocks noGrp="1"/>
+          </p:cNvSpPr>
+          <p:nvPr>
+            <p:ph type="sldImg" idx="2"/>
+          </p:nvPr>
+        </p:nvSpPr>
+        <p:spPr/>
+      </p:sp>
+      <p:sp>
+        <p:nvSpPr>
+          <p:cNvPr id="3" name="Notes Placeholder 2"/>
+          <p:cNvSpPr>
+            <a:spLocks noGrp="1"/>
+          </p:cNvSpPr>
+          <p:nvPr>
+            <p:ph type="body" idx="3" sz="quarter"/>
+          </p:nvPr>
+        </p:nvSpPr>
+        <p:spPr/>
+        <p:txBody>
+          <a:bodyPr/>
+          <a:lstStyle/>
+          <a:p>
+            <a:r>
+              <a:t>V4 合成見本（LAYV19）。視点固定方式の検証・たたき台。TGL（視点A）の bg_tgl を全面に敷き、同じ視点Aで生成した obj_rollcage_collapsing（崩れカゴ車）と worker_pinned（下敷き作業員）を回転は最小限（無回転）でそのまま重ねて事故シーンを1つ作成。各パーツは個別の画像オブジェクト（焼き込まない＝移動・回転・拡縮が可能）。生成時点で角度を揃える方式のため、パワポ側での回転合わせはほぼ不要。Googleのみ生成素材（gemini-3-pro-image-preview）・OpenAI不使用・非破壊。</a:t>
             </a:r>
           </a:p>
         </p:txBody>
@@ -4886,6 +4957,221 @@
 ・後からの回転合わせを最小化
 ・各パーツは透過PNG（rembg/Pillowで白背景を除去）
 ・合成見本は次スライド参照</a:t>
+            </a:r>
+          </a:p>
+        </p:txBody>
+      </p:sp>
+    </p:spTree>
+  </p:cSld>
+  <p:clrMapOvr>
+    <a:masterClrMapping/>
+  </p:clrMapOvr>
+</p:sld>
+</file>
+
+<file path=ppt/slides/slide2.xml><?xml version="1.0" encoding="utf-8"?>
+<p:sld xmlns:a="http://schemas.openxmlformats.org/drawingml/2006/main" xmlns:p="http://schemas.openxmlformats.org/presentationml/2006/main" xmlns:r="http://schemas.openxmlformats.org/officeDocument/2006/relationships">
+  <p:cSld>
+    <p:spTree>
+      <p:nvGrpSpPr>
+        <p:cNvPr id="1" name=""/>
+        <p:cNvGrpSpPr/>
+        <p:nvPr/>
+      </p:nvGrpSpPr>
+      <p:grpSpPr/>
+      <p:pic>
+        <p:nvPicPr>
+          <p:cNvPr id="2" name="Picture 1" descr="image.jpg"/>
+          <p:cNvPicPr>
+            <a:picLocks noChangeAspect="1"/>
+          </p:cNvPicPr>
+          <p:nvPr/>
+        </p:nvPicPr>
+        <p:blipFill>
+          <a:blip r:embed="rId2"/>
+          <a:stretch>
+            <a:fillRect/>
+          </a:stretch>
+        </p:blipFill>
+        <p:spPr>
+          <a:xfrm>
+            <a:off x="-190652" y="0"/>
+            <a:ext cx="12573000" cy="6858000"/>
+          </a:xfrm>
+          <a:prstGeom prst="rect">
+            <a:avLst/>
+          </a:prstGeom>
+        </p:spPr>
+      </p:pic>
+      <p:pic>
+        <p:nvPicPr>
+          <p:cNvPr id="3" name="Picture 2" descr="image.png"/>
+          <p:cNvPicPr>
+            <a:picLocks noChangeAspect="1"/>
+          </p:cNvPicPr>
+          <p:nvPr/>
+        </p:nvPicPr>
+        <p:blipFill>
+          <a:blip r:embed="rId3"/>
+          <a:stretch>
+            <a:fillRect/>
+          </a:stretch>
+        </p:blipFill>
+        <p:spPr>
+          <a:xfrm>
+            <a:off x="3840480" y="4262175"/>
+            <a:ext cx="4572000" cy="2092904"/>
+          </a:xfrm>
+          <a:prstGeom prst="rect">
+            <a:avLst/>
+          </a:prstGeom>
+        </p:spPr>
+      </p:pic>
+      <p:pic>
+        <p:nvPicPr>
+          <p:cNvPr id="4" name="Picture 3" descr="image.png"/>
+          <p:cNvPicPr>
+            <a:picLocks noChangeAspect="1"/>
+          </p:cNvPicPr>
+          <p:nvPr/>
+        </p:nvPicPr>
+        <p:blipFill>
+          <a:blip r:embed="rId4"/>
+          <a:stretch>
+            <a:fillRect/>
+          </a:stretch>
+        </p:blipFill>
+        <p:spPr>
+          <a:xfrm>
+            <a:off x="4892040" y="2655265"/>
+            <a:ext cx="2834640" cy="3334054"/>
+          </a:xfrm>
+          <a:prstGeom prst="rect">
+            <a:avLst/>
+          </a:prstGeom>
+        </p:spPr>
+      </p:pic>
+      <p:sp>
+        <p:nvSpPr>
+          <p:cNvPr id="5" name="Rounded Rectangle 4"/>
+          <p:cNvSpPr/>
+          <p:nvPr/>
+        </p:nvSpPr>
+        <p:spPr>
+          <a:xfrm>
+            <a:off x="320040" y="292608"/>
+            <a:ext cx="3749039" cy="457200"/>
+          </a:xfrm>
+          <a:prstGeom prst="roundRect">
+            <a:avLst/>
+          </a:prstGeom>
+          <a:solidFill>
+            <a:srgbClr val="1F3A5F">
+              <a:alpha val="78000"/>
+            </a:srgbClr>
+          </a:solidFill>
+          <a:ln>
+            <a:noFill/>
+          </a:ln>
+          <a:effectLst/>
+        </p:spPr>
+        <p:style>
+          <a:lnRef idx="1">
+            <a:schemeClr val="accent1"/>
+          </a:lnRef>
+          <a:fillRef idx="3">
+            <a:schemeClr val="accent1"/>
+          </a:fillRef>
+          <a:effectRef idx="2">
+            <a:schemeClr val="accent1"/>
+          </a:effectRef>
+          <a:fontRef idx="minor">
+            <a:schemeClr val="lt1"/>
+          </a:fontRef>
+        </p:style>
+        <p:txBody>
+          <a:bodyPr rtlCol="0" anchor="ctr" wrap="square" lIns="101600" rIns="101600" tIns="50800" bIns="50800"/>
+          <a:lstStyle/>
+          <a:p>
+            <a:pPr algn="l"/>
+            <a:r>
+              <a:rPr sz="1400" b="1" lang="ja-JP" altLang="en-US">
+                <a:solidFill>
+                  <a:srgbClr val="FFFFFF"/>
+                </a:solidFill>
+                <a:latin typeface="游ゴシック"/>
+                <a:ea typeface="游ゴシック"/>
+                <a:cs typeface="游ゴシック"/>
+              </a:rPr>
+              <a:t>合成見本（TGL）／全パーツ＝視点A・無回転</a:t>
+            </a:r>
+          </a:p>
+        </p:txBody>
+      </p:sp>
+      <p:sp>
+        <p:nvSpPr>
+          <p:cNvPr id="6" name="Rounded Rectangle 5"/>
+          <p:cNvSpPr/>
+          <p:nvPr/>
+        </p:nvSpPr>
+        <p:spPr>
+          <a:xfrm>
+            <a:off x="320040" y="5806440"/>
+            <a:ext cx="8595360" cy="777240"/>
+          </a:xfrm>
+          <a:prstGeom prst="roundRect">
+            <a:avLst/>
+          </a:prstGeom>
+          <a:solidFill>
+            <a:srgbClr val="1F3A5F">
+              <a:alpha val="78000"/>
+            </a:srgbClr>
+          </a:solidFill>
+          <a:ln>
+            <a:noFill/>
+          </a:ln>
+          <a:effectLst/>
+        </p:spPr>
+        <p:style>
+          <a:lnRef idx="1">
+            <a:schemeClr val="accent1"/>
+          </a:lnRef>
+          <a:fillRef idx="3">
+            <a:schemeClr val="accent1"/>
+          </a:fillRef>
+          <a:effectRef idx="2">
+            <a:schemeClr val="accent1"/>
+          </a:effectRef>
+          <a:fontRef idx="minor">
+            <a:schemeClr val="lt1"/>
+          </a:fontRef>
+        </p:style>
+        <p:txBody>
+          <a:bodyPr rtlCol="0" anchor="ctr" wrap="square" lIns="101600" rIns="101600" tIns="50800" bIns="50800"/>
+          <a:lstStyle/>
+          <a:p>
+            <a:pPr algn="l"/>
+            <a:r>
+              <a:rPr sz="1200" b="1" lang="ja-JP" altLang="en-US">
+                <a:solidFill>
+                  <a:srgbClr val="FFFFFF"/>
+                </a:solidFill>
+                <a:latin typeface="游ゴシック"/>
+                <a:ea typeface="游ゴシック"/>
+                <a:cs typeface="游ゴシック"/>
+              </a:rPr>
+              <a:t>視点固定方式の検証・たたき台：</a:t>
+            </a:r>
+            <a:r>
+              <a:rPr sz="1100" b="0" lang="ja-JP" altLang="en-US">
+                <a:solidFill>
+                  <a:srgbClr val="FFFFFF"/>
+                </a:solidFill>
+                <a:latin typeface="游ゴシック"/>
+                <a:ea typeface="游ゴシック"/>
+                <a:cs typeface="游ゴシック"/>
+              </a:rPr>
+              <a:t>背景／崩れカゴ車／下敷き作業員を同一視点A（同じ目線高さ・パース・光源）で生成し、回転0°でそのまま重ねただけ。各パーツは個別の画像オブジェクト（焼き込み無し＝移動・回転・拡縮可）。</a:t>
             </a:r>
           </a:p>
         </p:txBody>
